--- a/classes/parte-16-capstones-y-preparacion-de-certificaciones/308-capstone-campana-de-bug-bounty/clase-308-presentacion.pptx
+++ b/classes/parte-16-capstones-y-preparacion-de-certificaciones/308-capstone-campana-de-bug-bounty/clase-308-presentacion.pptx
@@ -17,6 +17,10 @@
     <p:sldId id="265" r:id="rId16"/>
     <p:sldId id="266" r:id="rId17"/>
     <p:sldId id="267" r:id="rId18"/>
+    <p:sldId id="268" r:id="rId19"/>
+    <p:sldId id="269" r:id="rId20"/>
+    <p:sldId id="270" r:id="rId21"/>
+    <p:sldId id="271" r:id="rId22"/>
   </p:sldIdLst>
   <p:sldSz cx="9144000" cy="6858000" type="screen4x3"/>
   <p:notesSz cx="6858000" cy="9144000"/>
@@ -3198,7 +3202,7 @@
                   <a:srgbClr val="0B3D2E"/>
                 </a:solidFill>
               </a:rPr>
-              <a:t>⚠️ Errores comunes</a:t>
+              <a:t>🧪 Laboratorio guiado</a:t>
             </a:r>
           </a:p>
         </p:txBody>
@@ -3236,67 +3240,97 @@
                   <a:srgbClr val="22282E"/>
                 </a:solidFill>
               </a:rPr>
-              <a:t>•  "Me banearon del programa" — Probaste fuera de scope; lee y respeta el alcance siempre.</a:t>
-            </a:r>
-          </a:p>
-          <a:p>
-            <a:pPr>
-              <a:spcAft>
-                <a:spcPts val="600"/>
-              </a:spcAft>
-            </a:pPr>
-            <a:r>
-              <a:rPr sz="1500">
-                <a:solidFill>
-                  <a:srgbClr val="22282E"/>
-                </a:solidFill>
-              </a:rPr>
-              <a:t>•  "Marcaron mi bug como duplicado" — Alguien reportó antes; mejora recon y velocidad, no te desanimes.</a:t>
-            </a:r>
-          </a:p>
-          <a:p>
-            <a:pPr>
-              <a:spcAft>
-                <a:spcPts val="600"/>
-              </a:spcAft>
-            </a:pPr>
-            <a:r>
-              <a:rPr sz="1500">
-                <a:solidFill>
-                  <a:srgbClr val="22282E"/>
-                </a:solidFill>
-              </a:rPr>
-              <a:t>•  "Rechazaron por 'informativo'" — Falta impacto demostrable; refuerza el PoC y el impacto de negocio.</a:t>
-            </a:r>
-          </a:p>
-          <a:p>
-            <a:pPr>
-              <a:spcAft>
-                <a:spcPts val="600"/>
-              </a:spcAft>
-            </a:pPr>
-            <a:r>
-              <a:rPr sz="1500">
-                <a:solidFill>
-                  <a:srgbClr val="22282E"/>
-                </a:solidFill>
-              </a:rPr>
-              <a:t>•  "El reporte no se entiende" — Pasos vagos; numera cada acción y añade capturas.</a:t>
-            </a:r>
-          </a:p>
-          <a:p>
-            <a:pPr>
-              <a:spcAft>
-                <a:spcPts val="600"/>
-              </a:spcAft>
-            </a:pPr>
-            <a:r>
-              <a:rPr sz="1500">
-                <a:solidFill>
-                  <a:srgbClr val="22282E"/>
-                </a:solidFill>
-              </a:rPr>
-              <a:t>•  "nuclei tumbó el servicio" — Escaneo intrusivo; usa plantillas suaves y respeta rate limits.</a:t>
+              <a:t>•  Elige programa y lee el scope. Anota activos en scope, exclusiones, tipos de bug aceptados y el safe harbor.</a:t>
+            </a:r>
+          </a:p>
+          <a:p>
+            <a:pPr>
+              <a:spcAft>
+                <a:spcPts val="600"/>
+              </a:spcAft>
+            </a:pPr>
+            <a:r>
+              <a:rPr sz="1500">
+                <a:solidFill>
+                  <a:srgbClr val="22282E"/>
+                </a:solidFill>
+              </a:rPr>
+              <a:t>•  Reconocimiento pasivo. Enumera subdominios con subfinder/amass y resuélvelos con httpx (respetando scope):</a:t>
+            </a:r>
+          </a:p>
+          <a:p>
+            <a:pPr>
+              <a:spcAft>
+                <a:spcPts val="600"/>
+              </a:spcAft>
+            </a:pPr>
+            <a:r>
+              <a:rPr sz="1500">
+                <a:solidFill>
+                  <a:srgbClr val="22282E"/>
+                </a:solidFill>
+              </a:rPr>
+              <a:t>•  Mapea la superficie. Recolecta URLs históricas con gau/waybackurls y clasifícalas por funcionalidad (login, API, upload).</a:t>
+            </a:r>
+          </a:p>
+          <a:p>
+            <a:pPr>
+              <a:spcAft>
+                <a:spcPts val="600"/>
+              </a:spcAft>
+            </a:pPr>
+            <a:r>
+              <a:rPr sz="1500">
+                <a:solidFill>
+                  <a:srgbClr val="22282E"/>
+                </a:solidFill>
+              </a:rPr>
+              <a:t>•  Escaneo ligero. Corre nuclei con plantillas no intrusivas para detectar exposiciones conocidas.</a:t>
+            </a:r>
+          </a:p>
+          <a:p>
+            <a:pPr>
+              <a:spcAft>
+                <a:spcPts val="600"/>
+              </a:spcAft>
+            </a:pPr>
+            <a:r>
+              <a:rPr sz="1500">
+                <a:solidFill>
+                  <a:srgbClr val="22282E"/>
+                </a:solidFill>
+              </a:rPr>
+              <a:t>•  Prioriza vectores. Elige 2–3 clases de alto valor coherentes con la app: IDOR, SSRF, XSS almacenado, fallos de autorización.</a:t>
+            </a:r>
+          </a:p>
+          <a:p>
+            <a:pPr>
+              <a:spcAft>
+                <a:spcPts val="600"/>
+              </a:spcAft>
+            </a:pPr>
+            <a:r>
+              <a:rPr sz="1500">
+                <a:solidFill>
+                  <a:srgbClr val="22282E"/>
+                </a:solidFill>
+              </a:rPr>
+              <a:t>•  Prueba manual con Burp. Intercepta, manipula parámetros y objetos; busca acceso a recursos ajenos (IDOR) o inyecciones.</a:t>
+            </a:r>
+          </a:p>
+          <a:p>
+            <a:pPr>
+              <a:spcAft>
+                <a:spcPts val="600"/>
+              </a:spcAft>
+            </a:pPr>
+            <a:r>
+              <a:rPr sz="1500">
+                <a:solidFill>
+                  <a:srgbClr val="22282E"/>
+                </a:solidFill>
+              </a:rPr>
+              <a:t>•  Valida con PoC mínima. Demuestra el bug sin exfiltrar datos reales (usa tu propia cuenta/objeto de prueba).</a:t>
             </a:r>
           </a:p>
         </p:txBody>
@@ -3347,7 +3381,7 @@
                   <a:srgbClr val="0B3D2E"/>
                 </a:solidFill>
               </a:rPr>
-              <a:t>❓ Preguntas frecuentes</a:t>
+              <a:t>✍️ Ejercicios</a:t>
             </a:r>
           </a:p>
         </p:txBody>
@@ -3385,97 +3419,82 @@
                   <a:srgbClr val="22282E"/>
                 </a:solidFill>
               </a:rPr>
-              <a:t>•  ❓ ¿Necesito Burp Pro?</a:t>
-            </a:r>
-          </a:p>
-          <a:p>
-            <a:pPr>
-              <a:spcAft>
-                <a:spcPts val="600"/>
-              </a:spcAft>
-            </a:pPr>
-            <a:r>
-              <a:rPr sz="1500">
-                <a:solidFill>
-                  <a:srgbClr val="22282E"/>
-                </a:solidFill>
-              </a:rPr>
-              <a:t>•  No para empezar. Burp Community y las herramientas abiertas bastan para muchos hallazgos.</a:t>
-            </a:r>
-          </a:p>
-          <a:p>
-            <a:pPr>
-              <a:spcAft>
-                <a:spcPts val="600"/>
-              </a:spcAft>
-            </a:pPr>
-            <a:r>
-              <a:rPr sz="1500">
-                <a:solidFill>
-                  <a:srgbClr val="22282E"/>
-                </a:solidFill>
-              </a:rPr>
-              <a:t>•  ❓ ¿Puedo exfiltrar datos para probar el impacto?</a:t>
-            </a:r>
-          </a:p>
-          <a:p>
-            <a:pPr>
-              <a:spcAft>
-                <a:spcPts val="600"/>
-              </a:spcAft>
-            </a:pPr>
-            <a:r>
-              <a:rPr sz="1500">
-                <a:solidFill>
-                  <a:srgbClr val="22282E"/>
-                </a:solidFill>
-              </a:rPr>
-              <a:t>•  No. Demuestra el acceso con un objeto propio o una prueba mínima; nunca extraigas datos reales de terceros.</a:t>
-            </a:r>
-          </a:p>
-          <a:p>
-            <a:pPr>
-              <a:spcAft>
-                <a:spcPts val="600"/>
-              </a:spcAft>
-            </a:pPr>
-            <a:r>
-              <a:rPr sz="1500">
-                <a:solidFill>
-                  <a:srgbClr val="22282E"/>
-                </a:solidFill>
-              </a:rPr>
-              <a:t>•  ❓ ¿Dónde practico sin riesgo legal?</a:t>
-            </a:r>
-          </a:p>
-          <a:p>
-            <a:pPr>
-              <a:spcAft>
-                <a:spcPts val="600"/>
-              </a:spcAft>
-            </a:pPr>
-            <a:r>
-              <a:rPr sz="1500">
-                <a:solidFill>
-                  <a:srgbClr val="22282E"/>
-                </a:solidFill>
-              </a:rPr>
-              <a:t>•  PortSwigger Web Security Academy y laboratorios propios. Aplica en programas reales solo dentro de scope.</a:t>
-            </a:r>
-          </a:p>
-          <a:p>
-            <a:pPr>
-              <a:spcAft>
-                <a:spcPts val="600"/>
-              </a:spcAft>
-            </a:pPr>
-            <a:r>
-              <a:rPr sz="1500">
-                <a:solidFill>
-                  <a:srgbClr val="22282E"/>
-                </a:solidFill>
-              </a:rPr>
-              <a:t>•  ❓ ¿Cómo evito duplicados?</a:t>
+              <a:t>•  Resume el scope de un programa real en una tabla (in/out, tipos aceptados).</a:t>
+            </a:r>
+          </a:p>
+          <a:p>
+            <a:pPr>
+              <a:spcAft>
+                <a:spcPts val="600"/>
+              </a:spcAft>
+            </a:pPr>
+            <a:r>
+              <a:rPr sz="1500">
+                <a:solidFill>
+                  <a:srgbClr val="22282E"/>
+                </a:solidFill>
+              </a:rPr>
+              <a:t>•  Ejecuta un flujo de recon y lista 10 activos en scope.</a:t>
+            </a:r>
+          </a:p>
+          <a:p>
+            <a:pPr>
+              <a:spcAft>
+                <a:spcPts val="600"/>
+              </a:spcAft>
+            </a:pPr>
+            <a:r>
+              <a:rPr sz="1500">
+                <a:solidFill>
+                  <a:srgbClr val="22282E"/>
+                </a:solidFill>
+              </a:rPr>
+              <a:t>•  Reproduce un IDOR y un XSS en PortSwigger Academy y documenta el PoC.</a:t>
+            </a:r>
+          </a:p>
+          <a:p>
+            <a:pPr>
+              <a:spcAft>
+                <a:spcPts val="600"/>
+              </a:spcAft>
+            </a:pPr>
+            <a:r>
+              <a:rPr sz="1500">
+                <a:solidFill>
+                  <a:srgbClr val="22282E"/>
+                </a:solidFill>
+              </a:rPr>
+              <a:t>•  Redacta un reporte completo de un bug de laboratorio.</a:t>
+            </a:r>
+          </a:p>
+          <a:p>
+            <a:pPr>
+              <a:spcAft>
+                <a:spcPts val="600"/>
+              </a:spcAft>
+            </a:pPr>
+            <a:r>
+              <a:rPr sz="1500">
+                <a:solidFill>
+                  <a:srgbClr val="22282E"/>
+                </a:solidFill>
+              </a:rPr>
+              <a:t>•  Puntúa dos hallazgos con CVSS y justifica la diferencia.</a:t>
+            </a:r>
+          </a:p>
+          <a:p>
+            <a:pPr>
+              <a:spcAft>
+                <a:spcPts val="600"/>
+              </a:spcAft>
+            </a:pPr>
+            <a:r>
+              <a:rPr sz="1500">
+                <a:solidFill>
+                  <a:srgbClr val="22282E"/>
+                </a:solidFill>
+              </a:rPr>
+              <a:t>•  Reescribe un reporte pobre para hacerlo "triable".</a:t>
             </a:r>
           </a:p>
         </p:txBody>
@@ -3526,7 +3545,7 @@
                   <a:srgbClr val="0B3D2E"/>
                 </a:solidFill>
               </a:rPr>
-              <a:t>🔗 Referencias</a:t>
+              <a:t>📝 Reto verificable</a:t>
             </a:r>
           </a:p>
         </p:txBody>
@@ -3564,6 +3583,438 @@
                   <a:srgbClr val="22282E"/>
                 </a:solidFill>
               </a:rPr>
+              <a:t>•  Entrega un reporte de vulnerabilidad (reporte-bugbounty.md) de calidad profesional —basado en un hallazgo de laboratorio (PortSwigger/tu app) o, si aplica, de un programa dentro de scope— con…</a:t>
+            </a:r>
+          </a:p>
+          <a:p>
+            <a:pPr>
+              <a:spcAft>
+                <a:spcPts val="600"/>
+              </a:spcAft>
+            </a:pPr>
+            <a:r>
+              <a:rPr sz="1500">
+                <a:solidFill>
+                  <a:srgbClr val="22282E"/>
+                </a:solidFill>
+              </a:rPr>
+              <a:t>•  Criterio de aceptación: los pasos de reproducción los puede seguir un tercero sin ambigüedad, la PoC no es destructiva ni exfiltra datos reales, el CVSS es coherente con el impacto, y hay una…</a:t>
+            </a:r>
+          </a:p>
+        </p:txBody>
+      </p:sp>
+    </p:spTree>
+  </p:cSld>
+  <p:clrMapOvr>
+    <a:masterClrMapping/>
+  </p:clrMapOvr>
+</p:sld>
+</file>
+
+<file path=ppt/slides/slide13.xml><?xml version="1.0" encoding="utf-8"?>
+<p:sld xmlns:a="http://schemas.openxmlformats.org/drawingml/2006/main" xmlns:p="http://schemas.openxmlformats.org/presentationml/2006/main" xmlns:r="http://schemas.openxmlformats.org/officeDocument/2006/relationships">
+  <p:cSld>
+    <p:spTree>
+      <p:nvGrpSpPr>
+        <p:cNvPr id="1" name=""/>
+        <p:cNvGrpSpPr/>
+        <p:nvPr/>
+      </p:nvGrpSpPr>
+      <p:grpSpPr/>
+      <p:sp>
+        <p:nvSpPr>
+          <p:cNvPr id="2" name="TextBox 1"/>
+          <p:cNvSpPr txBox="1"/>
+          <p:nvPr/>
+        </p:nvSpPr>
+        <p:spPr>
+          <a:xfrm>
+            <a:off x="457200" y="320040"/>
+            <a:ext cx="8229600" cy="822960"/>
+          </a:xfrm>
+          <a:prstGeom prst="rect">
+            <a:avLst/>
+          </a:prstGeom>
+          <a:noFill/>
+        </p:spPr>
+        <p:txBody>
+          <a:bodyPr wrap="square">
+            <a:spAutoFit/>
+          </a:bodyPr>
+          <a:lstStyle/>
+          <a:p>
+            <a:r>
+              <a:rPr sz="2600" b="1">
+                <a:solidFill>
+                  <a:srgbClr val="0B3D2E"/>
+                </a:solidFill>
+              </a:rPr>
+              <a:t>⚠️ Errores comunes</a:t>
+            </a:r>
+          </a:p>
+        </p:txBody>
+      </p:sp>
+      <p:sp>
+        <p:nvSpPr>
+          <p:cNvPr id="3" name="TextBox 2"/>
+          <p:cNvSpPr txBox="1"/>
+          <p:nvPr/>
+        </p:nvSpPr>
+        <p:spPr>
+          <a:xfrm>
+            <a:off x="457200" y="1280160"/>
+            <a:ext cx="8229600" cy="4937760"/>
+          </a:xfrm>
+          <a:prstGeom prst="rect">
+            <a:avLst/>
+          </a:prstGeom>
+          <a:noFill/>
+        </p:spPr>
+        <p:txBody>
+          <a:bodyPr wrap="square">
+            <a:spAutoFit/>
+          </a:bodyPr>
+          <a:lstStyle/>
+          <a:p>
+            <a:pPr>
+              <a:spcAft>
+                <a:spcPts val="600"/>
+              </a:spcAft>
+            </a:pPr>
+            <a:r>
+              <a:rPr sz="1500">
+                <a:solidFill>
+                  <a:srgbClr val="22282E"/>
+                </a:solidFill>
+              </a:rPr>
+              <a:t>•  "Me banearon del programa" — Probaste fuera de scope; lee y respeta el alcance siempre.</a:t>
+            </a:r>
+          </a:p>
+          <a:p>
+            <a:pPr>
+              <a:spcAft>
+                <a:spcPts val="600"/>
+              </a:spcAft>
+            </a:pPr>
+            <a:r>
+              <a:rPr sz="1500">
+                <a:solidFill>
+                  <a:srgbClr val="22282E"/>
+                </a:solidFill>
+              </a:rPr>
+              <a:t>•  "Marcaron mi bug como duplicado" — Alguien reportó antes; mejora recon y velocidad, no te desanimes.</a:t>
+            </a:r>
+          </a:p>
+          <a:p>
+            <a:pPr>
+              <a:spcAft>
+                <a:spcPts val="600"/>
+              </a:spcAft>
+            </a:pPr>
+            <a:r>
+              <a:rPr sz="1500">
+                <a:solidFill>
+                  <a:srgbClr val="22282E"/>
+                </a:solidFill>
+              </a:rPr>
+              <a:t>•  "Rechazaron por 'informativo'" — Falta impacto demostrable; refuerza el PoC y el impacto de negocio.</a:t>
+            </a:r>
+          </a:p>
+          <a:p>
+            <a:pPr>
+              <a:spcAft>
+                <a:spcPts val="600"/>
+              </a:spcAft>
+            </a:pPr>
+            <a:r>
+              <a:rPr sz="1500">
+                <a:solidFill>
+                  <a:srgbClr val="22282E"/>
+                </a:solidFill>
+              </a:rPr>
+              <a:t>•  "El reporte no se entiende" — Pasos vagos; numera cada acción y añade capturas.</a:t>
+            </a:r>
+          </a:p>
+          <a:p>
+            <a:pPr>
+              <a:spcAft>
+                <a:spcPts val="600"/>
+              </a:spcAft>
+            </a:pPr>
+            <a:r>
+              <a:rPr sz="1500">
+                <a:solidFill>
+                  <a:srgbClr val="22282E"/>
+                </a:solidFill>
+              </a:rPr>
+              <a:t>•  "nuclei tumbó el servicio" — Escaneo intrusivo; usa plantillas suaves y respeta rate limits.</a:t>
+            </a:r>
+          </a:p>
+        </p:txBody>
+      </p:sp>
+    </p:spTree>
+  </p:cSld>
+  <p:clrMapOvr>
+    <a:masterClrMapping/>
+  </p:clrMapOvr>
+</p:sld>
+</file>
+
+<file path=ppt/slides/slide14.xml><?xml version="1.0" encoding="utf-8"?>
+<p:sld xmlns:a="http://schemas.openxmlformats.org/drawingml/2006/main" xmlns:p="http://schemas.openxmlformats.org/presentationml/2006/main" xmlns:r="http://schemas.openxmlformats.org/officeDocument/2006/relationships">
+  <p:cSld>
+    <p:spTree>
+      <p:nvGrpSpPr>
+        <p:cNvPr id="1" name=""/>
+        <p:cNvGrpSpPr/>
+        <p:nvPr/>
+      </p:nvGrpSpPr>
+      <p:grpSpPr/>
+      <p:sp>
+        <p:nvSpPr>
+          <p:cNvPr id="2" name="TextBox 1"/>
+          <p:cNvSpPr txBox="1"/>
+          <p:nvPr/>
+        </p:nvSpPr>
+        <p:spPr>
+          <a:xfrm>
+            <a:off x="457200" y="320040"/>
+            <a:ext cx="8229600" cy="822960"/>
+          </a:xfrm>
+          <a:prstGeom prst="rect">
+            <a:avLst/>
+          </a:prstGeom>
+          <a:noFill/>
+        </p:spPr>
+        <p:txBody>
+          <a:bodyPr wrap="square">
+            <a:spAutoFit/>
+          </a:bodyPr>
+          <a:lstStyle/>
+          <a:p>
+            <a:r>
+              <a:rPr sz="2600" b="1">
+                <a:solidFill>
+                  <a:srgbClr val="0B3D2E"/>
+                </a:solidFill>
+              </a:rPr>
+              <a:t>❓ Preguntas frecuentes</a:t>
+            </a:r>
+          </a:p>
+        </p:txBody>
+      </p:sp>
+      <p:sp>
+        <p:nvSpPr>
+          <p:cNvPr id="3" name="TextBox 2"/>
+          <p:cNvSpPr txBox="1"/>
+          <p:nvPr/>
+        </p:nvSpPr>
+        <p:spPr>
+          <a:xfrm>
+            <a:off x="457200" y="1280160"/>
+            <a:ext cx="8229600" cy="4937760"/>
+          </a:xfrm>
+          <a:prstGeom prst="rect">
+            <a:avLst/>
+          </a:prstGeom>
+          <a:noFill/>
+        </p:spPr>
+        <p:txBody>
+          <a:bodyPr wrap="square">
+            <a:spAutoFit/>
+          </a:bodyPr>
+          <a:lstStyle/>
+          <a:p>
+            <a:pPr>
+              <a:spcAft>
+                <a:spcPts val="600"/>
+              </a:spcAft>
+            </a:pPr>
+            <a:r>
+              <a:rPr sz="1500">
+                <a:solidFill>
+                  <a:srgbClr val="22282E"/>
+                </a:solidFill>
+              </a:rPr>
+              <a:t>•  ❓ ¿Necesito Burp Pro?</a:t>
+            </a:r>
+          </a:p>
+          <a:p>
+            <a:pPr>
+              <a:spcAft>
+                <a:spcPts val="600"/>
+              </a:spcAft>
+            </a:pPr>
+            <a:r>
+              <a:rPr sz="1500">
+                <a:solidFill>
+                  <a:srgbClr val="22282E"/>
+                </a:solidFill>
+              </a:rPr>
+              <a:t>•  No para empezar. Burp Community y las herramientas abiertas bastan para muchos hallazgos.</a:t>
+            </a:r>
+          </a:p>
+          <a:p>
+            <a:pPr>
+              <a:spcAft>
+                <a:spcPts val="600"/>
+              </a:spcAft>
+            </a:pPr>
+            <a:r>
+              <a:rPr sz="1500">
+                <a:solidFill>
+                  <a:srgbClr val="22282E"/>
+                </a:solidFill>
+              </a:rPr>
+              <a:t>•  ❓ ¿Puedo exfiltrar datos para probar el impacto?</a:t>
+            </a:r>
+          </a:p>
+          <a:p>
+            <a:pPr>
+              <a:spcAft>
+                <a:spcPts val="600"/>
+              </a:spcAft>
+            </a:pPr>
+            <a:r>
+              <a:rPr sz="1500">
+                <a:solidFill>
+                  <a:srgbClr val="22282E"/>
+                </a:solidFill>
+              </a:rPr>
+              <a:t>•  No. Demuestra el acceso con un objeto propio o una prueba mínima; nunca extraigas datos reales de terceros.</a:t>
+            </a:r>
+          </a:p>
+          <a:p>
+            <a:pPr>
+              <a:spcAft>
+                <a:spcPts val="600"/>
+              </a:spcAft>
+            </a:pPr>
+            <a:r>
+              <a:rPr sz="1500">
+                <a:solidFill>
+                  <a:srgbClr val="22282E"/>
+                </a:solidFill>
+              </a:rPr>
+              <a:t>•  ❓ ¿Dónde practico sin riesgo legal?</a:t>
+            </a:r>
+          </a:p>
+          <a:p>
+            <a:pPr>
+              <a:spcAft>
+                <a:spcPts val="600"/>
+              </a:spcAft>
+            </a:pPr>
+            <a:r>
+              <a:rPr sz="1500">
+                <a:solidFill>
+                  <a:srgbClr val="22282E"/>
+                </a:solidFill>
+              </a:rPr>
+              <a:t>•  PortSwigger Web Security Academy y laboratorios propios. Aplica en programas reales solo dentro de scope.</a:t>
+            </a:r>
+          </a:p>
+          <a:p>
+            <a:pPr>
+              <a:spcAft>
+                <a:spcPts val="600"/>
+              </a:spcAft>
+            </a:pPr>
+            <a:r>
+              <a:rPr sz="1500">
+                <a:solidFill>
+                  <a:srgbClr val="22282E"/>
+                </a:solidFill>
+              </a:rPr>
+              <a:t>•  ❓ ¿Cómo evito duplicados?</a:t>
+            </a:r>
+          </a:p>
+        </p:txBody>
+      </p:sp>
+    </p:spTree>
+  </p:cSld>
+  <p:clrMapOvr>
+    <a:masterClrMapping/>
+  </p:clrMapOvr>
+</p:sld>
+</file>
+
+<file path=ppt/slides/slide15.xml><?xml version="1.0" encoding="utf-8"?>
+<p:sld xmlns:a="http://schemas.openxmlformats.org/drawingml/2006/main" xmlns:p="http://schemas.openxmlformats.org/presentationml/2006/main" xmlns:r="http://schemas.openxmlformats.org/officeDocument/2006/relationships">
+  <p:cSld>
+    <p:spTree>
+      <p:nvGrpSpPr>
+        <p:cNvPr id="1" name=""/>
+        <p:cNvGrpSpPr/>
+        <p:nvPr/>
+      </p:nvGrpSpPr>
+      <p:grpSpPr/>
+      <p:sp>
+        <p:nvSpPr>
+          <p:cNvPr id="2" name="TextBox 1"/>
+          <p:cNvSpPr txBox="1"/>
+          <p:nvPr/>
+        </p:nvSpPr>
+        <p:spPr>
+          <a:xfrm>
+            <a:off x="457200" y="320040"/>
+            <a:ext cx="8229600" cy="822960"/>
+          </a:xfrm>
+          <a:prstGeom prst="rect">
+            <a:avLst/>
+          </a:prstGeom>
+          <a:noFill/>
+        </p:spPr>
+        <p:txBody>
+          <a:bodyPr wrap="square">
+            <a:spAutoFit/>
+          </a:bodyPr>
+          <a:lstStyle/>
+          <a:p>
+            <a:r>
+              <a:rPr sz="2600" b="1">
+                <a:solidFill>
+                  <a:srgbClr val="0B3D2E"/>
+                </a:solidFill>
+              </a:rPr>
+              <a:t>🔗 Referencias</a:t>
+            </a:r>
+          </a:p>
+        </p:txBody>
+      </p:sp>
+      <p:sp>
+        <p:nvSpPr>
+          <p:cNvPr id="3" name="TextBox 2"/>
+          <p:cNvSpPr txBox="1"/>
+          <p:nvPr/>
+        </p:nvSpPr>
+        <p:spPr>
+          <a:xfrm>
+            <a:off x="457200" y="1280160"/>
+            <a:ext cx="8229600" cy="4937760"/>
+          </a:xfrm>
+          <a:prstGeom prst="rect">
+            <a:avLst/>
+          </a:prstGeom>
+          <a:noFill/>
+        </p:spPr>
+        <p:txBody>
+          <a:bodyPr wrap="square">
+            <a:spAutoFit/>
+          </a:bodyPr>
+          <a:lstStyle/>
+          <a:p>
+            <a:pPr>
+              <a:spcAft>
+                <a:spcPts val="600"/>
+              </a:spcAft>
+            </a:pPr>
+            <a:r>
+              <a:rPr sz="1500">
+                <a:solidFill>
+                  <a:srgbClr val="22282E"/>
+                </a:solidFill>
+              </a:rPr>
               <a:t>•  OWASP WSTG: &lt;https://owasp.org/www-project-web-security-testing-guide/&gt;</a:t>
             </a:r>
           </a:p>
@@ -3629,6 +4080,81 @@
           </a:p>
         </p:txBody>
       </p:sp>
+    </p:spTree>
+  </p:cSld>
+  <p:clrMapOvr>
+    <a:masterClrMapping/>
+  </p:clrMapOvr>
+</p:sld>
+</file>
+
+<file path=ppt/slides/slide16.xml><?xml version="1.0" encoding="utf-8"?>
+<p:sld xmlns:a="http://schemas.openxmlformats.org/drawingml/2006/main" xmlns:p="http://schemas.openxmlformats.org/presentationml/2006/main" xmlns:r="http://schemas.openxmlformats.org/officeDocument/2006/relationships">
+  <p:cSld>
+    <p:spTree>
+      <p:nvGrpSpPr>
+        <p:cNvPr id="1" name=""/>
+        <p:cNvGrpSpPr/>
+        <p:nvPr/>
+      </p:nvGrpSpPr>
+      <p:grpSpPr/>
+      <p:sp>
+        <p:nvSpPr>
+          <p:cNvPr id="2" name="TextBox 1"/>
+          <p:cNvSpPr txBox="1"/>
+          <p:nvPr/>
+        </p:nvSpPr>
+        <p:spPr>
+          <a:xfrm>
+            <a:off x="457200" y="274320"/>
+            <a:ext cx="8229600" cy="640080"/>
+          </a:xfrm>
+          <a:prstGeom prst="rect">
+            <a:avLst/>
+          </a:prstGeom>
+          <a:noFill/>
+        </p:spPr>
+        <p:txBody>
+          <a:bodyPr wrap="square">
+            <a:spAutoFit/>
+          </a:bodyPr>
+          <a:lstStyle/>
+          <a:p>
+            <a:r>
+              <a:rPr sz="2200" b="1">
+                <a:solidFill>
+                  <a:srgbClr val="0B3D2E"/>
+                </a:solidFill>
+              </a:rPr>
+              <a:t>Diagrama de la clase</a:t>
+            </a:r>
+          </a:p>
+        </p:txBody>
+      </p:sp>
+      <p:pic>
+        <p:nvPicPr>
+          <p:cNvPr id="3" name="Picture 2" descr="d88eb3bb46fd8893.png"/>
+          <p:cNvPicPr>
+            <a:picLocks noChangeAspect="1"/>
+          </p:cNvPicPr>
+          <p:nvPr/>
+        </p:nvPicPr>
+        <p:blipFill>
+          <a:blip r:embed="rId2"/>
+          <a:stretch>
+            <a:fillRect/>
+          </a:stretch>
+        </p:blipFill>
+        <p:spPr>
+          <a:xfrm>
+            <a:off x="457200" y="3334600"/>
+            <a:ext cx="8229600" cy="828880"/>
+          </a:xfrm>
+          <a:prstGeom prst="rect">
+            <a:avLst/>
+          </a:prstGeom>
+        </p:spPr>
+      </p:pic>
     </p:spTree>
   </p:cSld>
   <p:clrMapOvr>
@@ -3713,7 +4239,7 @@
                   <a:srgbClr val="22282E"/>
                 </a:solidFill>
               </a:rPr>
-              <a:t>•  Ejecutar una campaña de bug bounty ética y estructurada: elegir un programa, leer y respetar su alcance, hacer reconocimiento eficiente, priorizar vectores de alto impacto, validar hallazgos con PoC reproducibles y redactar reportes aceptables que maximicen la probabilidad de triage positivo. Integra la Parte 6 (web/OWASP), la Parte 7 (recon) y la Parte 3 (redes), aplicándolas al mundo real dentro de un marco legal.</a:t>
+              <a:t>•  Ejecutar una campaña de bug bounty ética y estructurada: elegir un programa, leer y respetar su alcance, hacer reconocimiento eficiente, priorizar vectores de alto impacto, validar hallazgos con PoC…</a:t>
             </a:r>
           </a:p>
         </p:txBody>
@@ -4107,7 +4633,7 @@
                   <a:srgbClr val="0B3D2E"/>
                 </a:solidFill>
               </a:rPr>
-              <a:t>📖 Definiciones y características</a:t>
+              <a:t>🧠 Explicación en profundidad</a:t>
             </a:r>
           </a:p>
         </p:txBody>
@@ -4145,82 +4671,22 @@
                   <a:srgbClr val="22282E"/>
                 </a:solidFill>
               </a:rPr>
-              <a:t>•  Scope: activos y pruebas permitidas por el programa. Característica: fuera de él, todo está prohibido.</a:t>
-            </a:r>
-          </a:p>
-          <a:p>
-            <a:pPr>
-              <a:spcAft>
-                <a:spcPts val="600"/>
-              </a:spcAft>
-            </a:pPr>
-            <a:r>
-              <a:rPr sz="1500">
-                <a:solidFill>
-                  <a:srgbClr val="22282E"/>
-                </a:solidFill>
-              </a:rPr>
-              <a:t>•  Safe harbor: cláusula que protege al investigador que actúa de buena fe dentro del scope. Característica: define tu cobertura legal.</a:t>
-            </a:r>
-          </a:p>
-          <a:p>
-            <a:pPr>
-              <a:spcAft>
-                <a:spcPts val="600"/>
-              </a:spcAft>
-            </a:pPr>
-            <a:r>
-              <a:rPr sz="1500">
-                <a:solidFill>
-                  <a:srgbClr val="22282E"/>
-                </a:solidFill>
-              </a:rPr>
-              <a:t>•  VDP (Vulnerability Disclosure Program): programa sin recompensa monetaria. Característica: bueno para practicar reputación.</a:t>
-            </a:r>
-          </a:p>
-          <a:p>
-            <a:pPr>
-              <a:spcAft>
-                <a:spcPts val="600"/>
-              </a:spcAft>
-            </a:pPr>
-            <a:r>
-              <a:rPr sz="1500">
-                <a:solidFill>
-                  <a:srgbClr val="22282E"/>
-                </a:solidFill>
-              </a:rPr>
-              <a:t>•  PoC (Proof of Concept): demostración mínima del bug. Característica: reproducible y sin impacto real.</a:t>
-            </a:r>
-          </a:p>
-          <a:p>
-            <a:pPr>
-              <a:spcAft>
-                <a:spcPts val="600"/>
-              </a:spcAft>
-            </a:pPr>
-            <a:r>
-              <a:rPr sz="1500">
-                <a:solidFill>
-                  <a:srgbClr val="22282E"/>
-                </a:solidFill>
-              </a:rPr>
-              <a:t>•  Triage: revisión del reporte por el equipo del programa. Característica: decide validez, severidad y duplicado.</a:t>
-            </a:r>
-          </a:p>
-          <a:p>
-            <a:pPr>
-              <a:spcAft>
-                <a:spcPts val="600"/>
-              </a:spcAft>
-            </a:pPr>
-            <a:r>
-              <a:rPr sz="1500">
-                <a:solidFill>
-                  <a:srgbClr val="22282E"/>
-                </a:solidFill>
-              </a:rPr>
-              <a:t>•  Duplicado: bug ya reportado por otro. Característica: no se recompensa; la velocidad importa.</a:t>
+              <a:t>•  Bug bounty requiere política vigente, activo incluido, prueba mínima y comunicación responsable. Hallar un endpoint público no concede permiso ilimitado. La clase convierte el objetivo en una…</a:t>
+            </a:r>
+          </a:p>
+          <a:p>
+            <a:pPr>
+              <a:spcAft>
+                <a:spcPts val="600"/>
+              </a:spcAft>
+            </a:pPr>
+            <a:r>
+              <a:rPr sz="1500">
+                <a:solidFill>
+                  <a:srgbClr val="22282E"/>
+                </a:solidFill>
+              </a:rPr>
+              <a:t>•  Un hallazgo parece duplicado. El investigador aporta evidencia nueva sin ampliar impacto ni acceder a datos ajenos.</a:t>
             </a:r>
           </a:p>
         </p:txBody>
@@ -4271,7 +4737,7 @@
                   <a:srgbClr val="0B3D2E"/>
                 </a:solidFill>
               </a:rPr>
-              <a:t>🧰 Herramientas y preparación</a:t>
+              <a:t>📔 Glosario operativo</a:t>
             </a:r>
           </a:p>
         </p:txBody>
@@ -4309,67 +4775,52 @@
                   <a:srgbClr val="22282E"/>
                 </a:solidFill>
               </a:rPr>
-              <a:t>•  Cuenta en una plataforma (HackerOne/Bugcrowd/Intigriti) y lectura del scope de un programa.</a:t>
-            </a:r>
-          </a:p>
-          <a:p>
-            <a:pPr>
-              <a:spcAft>
-                <a:spcPts val="600"/>
-              </a:spcAft>
-            </a:pPr>
-            <a:r>
-              <a:rPr sz="1500">
-                <a:solidFill>
-                  <a:srgbClr val="22282E"/>
-                </a:solidFill>
-              </a:rPr>
-              <a:t>•  Recon: subfinder, amass, httpx, nuclei, gau/waybackurls, ffuf.</a:t>
-            </a:r>
-          </a:p>
-          <a:p>
-            <a:pPr>
-              <a:spcAft>
-                <a:spcPts val="600"/>
-              </a:spcAft>
-            </a:pPr>
-            <a:r>
-              <a:rPr sz="1500">
-                <a:solidFill>
-                  <a:srgbClr val="22282E"/>
-                </a:solidFill>
-              </a:rPr>
-              <a:t>•  Proxy: Burp Suite (Community/Pro) para interceptar y manipular.</a:t>
-            </a:r>
-          </a:p>
-          <a:p>
-            <a:pPr>
-              <a:spcAft>
-                <a:spcPts val="600"/>
-              </a:spcAft>
-            </a:pPr>
-            <a:r>
-              <a:rPr sz="1500">
-                <a:solidFill>
-                  <a:srgbClr val="22282E"/>
-                </a:solidFill>
-              </a:rPr>
-              <a:t>•  Notas y capturas para el reporte; plantilla de reporte con secciones estándar.</a:t>
-            </a:r>
-          </a:p>
-          <a:p>
-            <a:pPr>
-              <a:spcAft>
-                <a:spcPts val="600"/>
-              </a:spcAft>
-            </a:pPr>
-            <a:r>
-              <a:rPr sz="1500">
-                <a:solidFill>
-                  <a:srgbClr val="22282E"/>
-                </a:solidFill>
-              </a:rPr>
-              <a:t>•  Un laboratorio propio (PortSwigger Web Security Academy) para practicar técnicas antes de ir al programa real.</a:t>
+              <a:t>•  Término — Definición</a:t>
+            </a:r>
+          </a:p>
+          <a:p>
+            <a:pPr>
+              <a:spcAft>
+                <a:spcPts val="600"/>
+              </a:spcAft>
+            </a:pPr>
+            <a:r>
+              <a:rPr sz="1500">
+                <a:solidFill>
+                  <a:srgbClr val="22282E"/>
+                </a:solidFill>
+              </a:rPr>
+              <a:t>•  Safe harbor — Protección declarada condicionada al cumplimiento de política.</a:t>
+            </a:r>
+          </a:p>
+          <a:p>
+            <a:pPr>
+              <a:spcAft>
+                <a:spcPts val="600"/>
+              </a:spcAft>
+            </a:pPr>
+            <a:r>
+              <a:rPr sz="1500">
+                <a:solidFill>
+                  <a:srgbClr val="22282E"/>
+                </a:solidFill>
+              </a:rPr>
+              <a:t>•  Evidencia — Resultado que otra persona puede revisar y relacionar con un criterio.</a:t>
+            </a:r>
+          </a:p>
+          <a:p>
+            <a:pPr>
+              <a:spcAft>
+                <a:spcPts val="600"/>
+              </a:spcAft>
+            </a:pPr>
+            <a:r>
+              <a:rPr sz="1500">
+                <a:solidFill>
+                  <a:srgbClr val="22282E"/>
+                </a:solidFill>
+              </a:rPr>
+              <a:t>•  Retrospectiva — Revisión de decisiones, límites y siguiente mejora.</a:t>
             </a:r>
           </a:p>
         </p:txBody>
@@ -4420,7 +4871,7 @@
                   <a:srgbClr val="0B3D2E"/>
                 </a:solidFill>
               </a:rPr>
-              <a:t>🧪 Laboratorio guiado</a:t>
+              <a:t>✅ Criterio de dominio</a:t>
             </a:r>
           </a:p>
         </p:txBody>
@@ -4458,97 +4909,7 @@
                   <a:srgbClr val="22282E"/>
                 </a:solidFill>
               </a:rPr>
-              <a:t>•  Elige programa y lee el scope. Anota activos en scope, exclusiones, tipos de bug aceptados y el safe harbor.</a:t>
-            </a:r>
-          </a:p>
-          <a:p>
-            <a:pPr>
-              <a:spcAft>
-                <a:spcPts val="600"/>
-              </a:spcAft>
-            </a:pPr>
-            <a:r>
-              <a:rPr sz="1500">
-                <a:solidFill>
-                  <a:srgbClr val="22282E"/>
-                </a:solidFill>
-              </a:rPr>
-              <a:t>•  Reconocimiento pasivo. Enumera subdominios con subfinder/amass y resuélvelos con httpx (respetando scope):</a:t>
-            </a:r>
-          </a:p>
-          <a:p>
-            <a:pPr>
-              <a:spcAft>
-                <a:spcPts val="600"/>
-              </a:spcAft>
-            </a:pPr>
-            <a:r>
-              <a:rPr sz="1500">
-                <a:solidFill>
-                  <a:srgbClr val="22282E"/>
-                </a:solidFill>
-              </a:rPr>
-              <a:t>•  subfinder -d ejemplo-en-scope.com -silent | httpx -silent -status-code -title</a:t>
-            </a:r>
-          </a:p>
-          <a:p>
-            <a:pPr>
-              <a:spcAft>
-                <a:spcPts val="600"/>
-              </a:spcAft>
-            </a:pPr>
-            <a:r>
-              <a:rPr sz="1500">
-                <a:solidFill>
-                  <a:srgbClr val="22282E"/>
-                </a:solidFill>
-              </a:rPr>
-              <a:t>•  Mapea la superficie. Recolecta URLs históricas con gau/waybackurls y clasifícalas por funcionalidad (login, API, upload).</a:t>
-            </a:r>
-          </a:p>
-          <a:p>
-            <a:pPr>
-              <a:spcAft>
-                <a:spcPts val="600"/>
-              </a:spcAft>
-            </a:pPr>
-            <a:r>
-              <a:rPr sz="1500">
-                <a:solidFill>
-                  <a:srgbClr val="22282E"/>
-                </a:solidFill>
-              </a:rPr>
-              <a:t>•  Escaneo ligero. Corre nuclei con plantillas no intrusivas para detectar exposiciones conocidas.</a:t>
-            </a:r>
-          </a:p>
-          <a:p>
-            <a:pPr>
-              <a:spcAft>
-                <a:spcPts val="600"/>
-              </a:spcAft>
-            </a:pPr>
-            <a:r>
-              <a:rPr sz="1500">
-                <a:solidFill>
-                  <a:srgbClr val="22282E"/>
-                </a:solidFill>
-              </a:rPr>
-              <a:t>•  Prioriza vectores. Elige 2–3 clases de alto valor coherentes con la app: IDOR, SSRF, XSS almacenado, fallos de autorización.</a:t>
-            </a:r>
-          </a:p>
-          <a:p>
-            <a:pPr>
-              <a:spcAft>
-                <a:spcPts val="600"/>
-              </a:spcAft>
-            </a:pPr>
-            <a:r>
-              <a:rPr sz="1500">
-                <a:solidFill>
-                  <a:srgbClr val="22282E"/>
-                </a:solidFill>
-              </a:rPr>
-              <a:t>•  Prueba manual con Burp. Intercepta, manipula parámetros y objetos; busca acceso a recursos ajenos (IDOR) o inyecciones.</a:t>
+              <a:t>•  El alumno domina la clase cuando planifica, ejecuta y comunica una evidencia completa, respeta alcance y puede defender sus decisiones ante una revisión.</a:t>
             </a:r>
           </a:p>
         </p:txBody>
@@ -4599,7 +4960,7 @@
                   <a:srgbClr val="0B3D2E"/>
                 </a:solidFill>
               </a:rPr>
-              <a:t>✍️ Ejercicios</a:t>
+              <a:t>📖 Definiciones y características</a:t>
             </a:r>
           </a:p>
         </p:txBody>
@@ -4637,82 +4998,82 @@
                   <a:srgbClr val="22282E"/>
                 </a:solidFill>
               </a:rPr>
-              <a:t>•  Resume el scope de un programa real en una tabla (in/out, tipos aceptados).</a:t>
-            </a:r>
-          </a:p>
-          <a:p>
-            <a:pPr>
-              <a:spcAft>
-                <a:spcPts val="600"/>
-              </a:spcAft>
-            </a:pPr>
-            <a:r>
-              <a:rPr sz="1500">
-                <a:solidFill>
-                  <a:srgbClr val="22282E"/>
-                </a:solidFill>
-              </a:rPr>
-              <a:t>•  Ejecuta un flujo de recon y lista 10 activos en scope.</a:t>
-            </a:r>
-          </a:p>
-          <a:p>
-            <a:pPr>
-              <a:spcAft>
-                <a:spcPts val="600"/>
-              </a:spcAft>
-            </a:pPr>
-            <a:r>
-              <a:rPr sz="1500">
-                <a:solidFill>
-                  <a:srgbClr val="22282E"/>
-                </a:solidFill>
-              </a:rPr>
-              <a:t>•  Reproduce un IDOR y un XSS en PortSwigger Academy y documenta el PoC.</a:t>
-            </a:r>
-          </a:p>
-          <a:p>
-            <a:pPr>
-              <a:spcAft>
-                <a:spcPts val="600"/>
-              </a:spcAft>
-            </a:pPr>
-            <a:r>
-              <a:rPr sz="1500">
-                <a:solidFill>
-                  <a:srgbClr val="22282E"/>
-                </a:solidFill>
-              </a:rPr>
-              <a:t>•  Redacta un reporte completo de un bug de laboratorio.</a:t>
-            </a:r>
-          </a:p>
-          <a:p>
-            <a:pPr>
-              <a:spcAft>
-                <a:spcPts val="600"/>
-              </a:spcAft>
-            </a:pPr>
-            <a:r>
-              <a:rPr sz="1500">
-                <a:solidFill>
-                  <a:srgbClr val="22282E"/>
-                </a:solidFill>
-              </a:rPr>
-              <a:t>•  Puntúa dos hallazgos con CVSS y justifica la diferencia.</a:t>
-            </a:r>
-          </a:p>
-          <a:p>
-            <a:pPr>
-              <a:spcAft>
-                <a:spcPts val="600"/>
-              </a:spcAft>
-            </a:pPr>
-            <a:r>
-              <a:rPr sz="1500">
-                <a:solidFill>
-                  <a:srgbClr val="22282E"/>
-                </a:solidFill>
-              </a:rPr>
-              <a:t>•  Reescribe un reporte pobre para hacerlo "triable".</a:t>
+              <a:t>•  Scope: activos y pruebas permitidas por el programa. Característica: fuera de él, todo está prohibido.</a:t>
+            </a:r>
+          </a:p>
+          <a:p>
+            <a:pPr>
+              <a:spcAft>
+                <a:spcPts val="600"/>
+              </a:spcAft>
+            </a:pPr>
+            <a:r>
+              <a:rPr sz="1500">
+                <a:solidFill>
+                  <a:srgbClr val="22282E"/>
+                </a:solidFill>
+              </a:rPr>
+              <a:t>•  Safe harbor: cláusula que protege al investigador que actúa de buena fe dentro del scope. Característica: define tu cobertura legal.</a:t>
+            </a:r>
+          </a:p>
+          <a:p>
+            <a:pPr>
+              <a:spcAft>
+                <a:spcPts val="600"/>
+              </a:spcAft>
+            </a:pPr>
+            <a:r>
+              <a:rPr sz="1500">
+                <a:solidFill>
+                  <a:srgbClr val="22282E"/>
+                </a:solidFill>
+              </a:rPr>
+              <a:t>•  VDP (Vulnerability Disclosure Program): programa sin recompensa monetaria. Característica: bueno para practicar reputación.</a:t>
+            </a:r>
+          </a:p>
+          <a:p>
+            <a:pPr>
+              <a:spcAft>
+                <a:spcPts val="600"/>
+              </a:spcAft>
+            </a:pPr>
+            <a:r>
+              <a:rPr sz="1500">
+                <a:solidFill>
+                  <a:srgbClr val="22282E"/>
+                </a:solidFill>
+              </a:rPr>
+              <a:t>•  PoC (Proof of Concept): demostración mínima del bug. Característica: reproducible y sin impacto real.</a:t>
+            </a:r>
+          </a:p>
+          <a:p>
+            <a:pPr>
+              <a:spcAft>
+                <a:spcPts val="600"/>
+              </a:spcAft>
+            </a:pPr>
+            <a:r>
+              <a:rPr sz="1500">
+                <a:solidFill>
+                  <a:srgbClr val="22282E"/>
+                </a:solidFill>
+              </a:rPr>
+              <a:t>•  Triage: revisión del reporte por el equipo del programa. Característica: decide validez, severidad y duplicado.</a:t>
+            </a:r>
+          </a:p>
+          <a:p>
+            <a:pPr>
+              <a:spcAft>
+                <a:spcPts val="600"/>
+              </a:spcAft>
+            </a:pPr>
+            <a:r>
+              <a:rPr sz="1500">
+                <a:solidFill>
+                  <a:srgbClr val="22282E"/>
+                </a:solidFill>
+              </a:rPr>
+              <a:t>•  Duplicado: bug ya reportado por otro. Característica: no se recompensa; la velocidad importa.</a:t>
             </a:r>
           </a:p>
         </p:txBody>
@@ -4763,7 +5124,7 @@
                   <a:srgbClr val="0B3D2E"/>
                 </a:solidFill>
               </a:rPr>
-              <a:t>📝 Reto verificable</a:t>
+              <a:t>🧰 Herramientas y preparación</a:t>
             </a:r>
           </a:p>
         </p:txBody>
@@ -4801,22 +5162,67 @@
                   <a:srgbClr val="22282E"/>
                 </a:solidFill>
               </a:rPr>
-              <a:t>•  Entrega un reporte de vulnerabilidad (reporte-bugbounty.md) de calidad profesional —basado en un hallazgo de laboratorio (PortSwigger/tu app) o, si aplica, de un programa dentro de scope— con: resumen, activo afectado, pasos de reproducción numerados, PoC no destructiva, CVSS e impacto de negocio y remediación. Incluye una nota de scope/ética.</a:t>
-            </a:r>
-          </a:p>
-          <a:p>
-            <a:pPr>
-              <a:spcAft>
-                <a:spcPts val="600"/>
-              </a:spcAft>
-            </a:pPr>
-            <a:r>
-              <a:rPr sz="1500">
-                <a:solidFill>
-                  <a:srgbClr val="22282E"/>
-                </a:solidFill>
-              </a:rPr>
-              <a:t>•  Criterio de aceptación: los pasos de reproducción los puede seguir un tercero sin ambigüedad, la PoC no es destructiva ni exfiltra datos reales, el CVSS es coherente con el impacto, y hay una declaración explícita de que se actuó dentro de scope.</a:t>
+              <a:t>•  Cuenta en una plataforma (HackerOne/Bugcrowd/Intigriti) y lectura del scope de un programa.</a:t>
+            </a:r>
+          </a:p>
+          <a:p>
+            <a:pPr>
+              <a:spcAft>
+                <a:spcPts val="600"/>
+              </a:spcAft>
+            </a:pPr>
+            <a:r>
+              <a:rPr sz="1500">
+                <a:solidFill>
+                  <a:srgbClr val="22282E"/>
+                </a:solidFill>
+              </a:rPr>
+              <a:t>•  Recon: subfinder, amass, httpx, nuclei, gau/waybackurls, ffuf.</a:t>
+            </a:r>
+          </a:p>
+          <a:p>
+            <a:pPr>
+              <a:spcAft>
+                <a:spcPts val="600"/>
+              </a:spcAft>
+            </a:pPr>
+            <a:r>
+              <a:rPr sz="1500">
+                <a:solidFill>
+                  <a:srgbClr val="22282E"/>
+                </a:solidFill>
+              </a:rPr>
+              <a:t>•  Proxy: Burp Suite (Community/Pro) para interceptar y manipular.</a:t>
+            </a:r>
+          </a:p>
+          <a:p>
+            <a:pPr>
+              <a:spcAft>
+                <a:spcPts val="600"/>
+              </a:spcAft>
+            </a:pPr>
+            <a:r>
+              <a:rPr sz="1500">
+                <a:solidFill>
+                  <a:srgbClr val="22282E"/>
+                </a:solidFill>
+              </a:rPr>
+              <a:t>•  Notas y capturas para el reporte; plantilla de reporte con secciones estándar.</a:t>
+            </a:r>
+          </a:p>
+          <a:p>
+            <a:pPr>
+              <a:spcAft>
+                <a:spcPts val="600"/>
+              </a:spcAft>
+            </a:pPr>
+            <a:r>
+              <a:rPr sz="1500">
+                <a:solidFill>
+                  <a:srgbClr val="22282E"/>
+                </a:solidFill>
+              </a:rPr>
+              <a:t>•  Un laboratorio propio (PortSwigger Web Security Academy) para practicar técnicas antes de ir al programa real.</a:t>
             </a:r>
           </a:p>
         </p:txBody>
